--- a/答辩材料/答辩PPT_财报智读.pptx
+++ b/答辩材料/答辩PPT_财报智读.pptx
@@ -901,7 +901,7 @@
           <a:lstStyle/>
           <a:p>
             <a:r>
-              <a:t>这是团队分工。四个人分别对应系统的四个部分：我负责系统架构、指标计算引擎和行业对标算法；贾爱柯负责前端界面与交互设计；海宸负责数据采集与质量校验；崔德昊负责 Prompt 工程与对照实验。桂斌老师负责整体指导。</a:t>
+              <a:t>这是团队分工。三个人分别对应系统的三个部分：我负责系统架构、指标计算引擎、行业对标算法和数据库设计；贾爱柯负责前端界面与交互设计；崔德昊负责数据采集与质量核验、Prompt 工程与对照实验。桂斌老师负责整体指导。</a:t>
             </a:r>
           </a:p>
           <a:p>
@@ -4926,7 +4926,7 @@
                 <a:ea typeface="微软雅黑"/>
                 <a:cs typeface="微软雅黑"/>
               </a:rPr>
-              <a:t>汇报人：韩宇　　团队成员：贾爱柯、海宸、崔德昊　　指导教师：桂斌</a:t>
+              <a:t>汇报人：韩宇　　团队成员：贾爱柯、崔德昊　　指导教师：桂斌</a:t>
             </a:r>
           </a:p>
           <a:p>
@@ -11400,7 +11400,7 @@
                 <a:ea typeface="微软雅黑"/>
                 <a:cs typeface="微软雅黑"/>
               </a:rPr>
-              <a:t>四人分工与系统模块一一对应</a:t>
+              <a:t>三人分工与系统模块一一对应</a:t>
             </a:r>
           </a:p>
         </p:txBody>
@@ -11668,7 +11668,7 @@
         <p:spPr>
           <a:xfrm>
             <a:off x="396000" y="1800000"/>
-            <a:ext cx="11304000" cy="864000"/>
+            <a:ext cx="11304000" cy="1080000"/>
           </a:xfrm>
           <a:prstGeom prst="rect">
             <a:avLst/>
@@ -11713,8 +11713,8 @@
         </p:nvSpPr>
         <p:spPr>
           <a:xfrm>
-            <a:off x="540000" y="1951200"/>
-            <a:ext cx="2448000" cy="612000"/>
+            <a:off x="540000" y="2023200"/>
+            <a:ext cx="2448000" cy="684000"/>
           </a:xfrm>
           <a:prstGeom prst="rect">
             <a:avLst/>
@@ -11754,8 +11754,8 @@
         </p:nvSpPr>
         <p:spPr>
           <a:xfrm>
-            <a:off x="3204000" y="1951200"/>
-            <a:ext cx="4104000" cy="612000"/>
+            <a:off x="3204000" y="2023200"/>
+            <a:ext cx="4104000" cy="684000"/>
           </a:xfrm>
           <a:prstGeom prst="rect">
             <a:avLst/>
@@ -11782,7 +11782,7 @@
                 <a:ea typeface="微软雅黑"/>
                 <a:cs typeface="微软雅黑"/>
               </a:rPr>
-              <a:t>系统架构、指标计算引擎、行业对标算法</a:t>
+              <a:t>系统架构、指标计算引擎、行业对标算法、数据库设计</a:t>
             </a:r>
           </a:p>
         </p:txBody>
@@ -11795,8 +11795,8 @@
         </p:nvSpPr>
         <p:spPr>
           <a:xfrm>
-            <a:off x="7524000" y="1951200"/>
-            <a:ext cx="4104000" cy="612000"/>
+            <a:off x="7524000" y="2023200"/>
+            <a:ext cx="4104000" cy="684000"/>
           </a:xfrm>
           <a:prstGeom prst="rect">
             <a:avLst/>
@@ -11823,7 +11823,7 @@
                 <a:ea typeface="微软雅黑"/>
                 <a:cs typeface="微软雅黑"/>
               </a:rPr>
-              <a:t>后端核心代码、《技术文档》、论文第 3 章</a:t>
+              <a:t>后端核心代码、建表脚本、《技术文档》、论文第 3 章</a:t>
             </a:r>
           </a:p>
         </p:txBody>
@@ -11836,8 +11836,8 @@
         </p:nvSpPr>
         <p:spPr>
           <a:xfrm>
-            <a:off x="396000" y="2664000"/>
-            <a:ext cx="11304000" cy="864000"/>
+            <a:off x="396000" y="2880000"/>
+            <a:ext cx="11304000" cy="1080000"/>
           </a:xfrm>
           <a:prstGeom prst="rect">
             <a:avLst/>
@@ -11882,8 +11882,8 @@
         </p:nvSpPr>
         <p:spPr>
           <a:xfrm>
-            <a:off x="540000" y="2815200"/>
-            <a:ext cx="2448000" cy="612000"/>
+            <a:off x="540000" y="3103200"/>
+            <a:ext cx="2448000" cy="684000"/>
           </a:xfrm>
           <a:prstGeom prst="rect">
             <a:avLst/>
@@ -11923,8 +11923,8 @@
         </p:nvSpPr>
         <p:spPr>
           <a:xfrm>
-            <a:off x="3204000" y="2815200"/>
-            <a:ext cx="4104000" cy="612000"/>
+            <a:off x="3204000" y="3103200"/>
+            <a:ext cx="4104000" cy="684000"/>
           </a:xfrm>
           <a:prstGeom prst="rect">
             <a:avLst/>
@@ -11951,7 +11951,7 @@
                 <a:ea typeface="微软雅黑"/>
                 <a:cs typeface="微软雅黑"/>
               </a:rPr>
-              <a:t>前端界面与交互、设计令牌体系、ECharts 可视化</a:t>
+              <a:t>前端界面与交互、设计令牌体系、ECharts 可视化、响应式与数据导出</a:t>
             </a:r>
           </a:p>
         </p:txBody>
@@ -11964,8 +11964,8 @@
         </p:nvSpPr>
         <p:spPr>
           <a:xfrm>
-            <a:off x="7524000" y="2815200"/>
-            <a:ext cx="4104000" cy="612000"/>
+            <a:off x="7524000" y="3103200"/>
+            <a:ext cx="4104000" cy="684000"/>
           </a:xfrm>
           <a:prstGeom prst="rect">
             <a:avLst/>
@@ -12005,8 +12005,8 @@
         </p:nvSpPr>
         <p:spPr>
           <a:xfrm>
-            <a:off x="396000" y="3528000"/>
-            <a:ext cx="11304000" cy="864000"/>
+            <a:off x="396000" y="3960000"/>
+            <a:ext cx="11304000" cy="1080000"/>
           </a:xfrm>
           <a:prstGeom prst="rect">
             <a:avLst/>
@@ -12051,8 +12051,8 @@
         </p:nvSpPr>
         <p:spPr>
           <a:xfrm>
-            <a:off x="540000" y="3679200"/>
-            <a:ext cx="2448000" cy="612000"/>
+            <a:off x="540000" y="4183200"/>
+            <a:ext cx="2448000" cy="684000"/>
           </a:xfrm>
           <a:prstGeom prst="rect">
             <a:avLst/>
@@ -12079,7 +12079,7 @@
                 <a:ea typeface="微软雅黑"/>
                 <a:cs typeface="微软雅黑"/>
               </a:rPr>
-              <a:t>海宸</a:t>
+              <a:t>崔德昊</a:t>
             </a:r>
           </a:p>
         </p:txBody>
@@ -12092,8 +12092,8 @@
         </p:nvSpPr>
         <p:spPr>
           <a:xfrm>
-            <a:off x="3204000" y="3679200"/>
-            <a:ext cx="4104000" cy="612000"/>
+            <a:off x="3204000" y="4183200"/>
+            <a:ext cx="4104000" cy="684000"/>
           </a:xfrm>
           <a:prstGeom prst="rect">
             <a:avLst/>
@@ -12120,7 +12120,7 @@
                 <a:ea typeface="微软雅黑"/>
                 <a:cs typeface="微软雅黑"/>
               </a:rPr>
-              <a:t>数据采集与质量校验、数据库设计、估值快照</a:t>
+              <a:t>数据采集与质量核验、Prompt 工程与对照实验、数值溯源校验、实验统计</a:t>
             </a:r>
           </a:p>
         </p:txBody>
@@ -12133,8 +12133,8 @@
         </p:nvSpPr>
         <p:spPr>
           <a:xfrm>
-            <a:off x="7524000" y="3679200"/>
-            <a:ext cx="4104000" cy="612000"/>
+            <a:off x="7524000" y="4183200"/>
+            <a:ext cx="4104000" cy="684000"/>
           </a:xfrm>
           <a:prstGeom prst="rect">
             <a:avLst/>
@@ -12161,190 +12161,21 @@
                 <a:ea typeface="微软雅黑"/>
                 <a:cs typeface="微软雅黑"/>
               </a:rPr>
-              <a:t>数据采集脚本、建表脚本、数据核验表</a:t>
-            </a:r>
-          </a:p>
-        </p:txBody>
-      </p:sp>
-      <p:sp>
-        <p:nvSpPr>
-          <p:cNvPr id="23" name="Rectangle 22"/>
+              <a:t>采集脚本、三层 Prompt 模板、评测脚本、实验数据与论文第 5 章</a:t>
+            </a:r>
+          </a:p>
+        </p:txBody>
+      </p:sp>
+      <p:sp>
+        <p:nvSpPr>
+          <p:cNvPr id="23" name="Rounded Rectangle 22"/>
           <p:cNvSpPr/>
           <p:nvPr/>
         </p:nvSpPr>
         <p:spPr>
           <a:xfrm>
-            <a:off x="396000" y="4392000"/>
-            <a:ext cx="11304000" cy="864000"/>
-          </a:xfrm>
-          <a:prstGeom prst="rect">
-            <a:avLst/>
-          </a:prstGeom>
-          <a:solidFill>
-            <a:srgbClr val="EEF2F7"/>
-          </a:solidFill>
-          <a:ln w="9525">
-            <a:solidFill>
-              <a:srgbClr val="E1E8F0"/>
-            </a:solidFill>
-          </a:ln>
-          <a:effectLst/>
-        </p:spPr>
-        <p:style>
-          <a:lnRef idx="1">
-            <a:schemeClr val="accent1"/>
-          </a:lnRef>
-          <a:fillRef idx="3">
-            <a:schemeClr val="accent1"/>
-          </a:fillRef>
-          <a:effectRef idx="2">
-            <a:schemeClr val="accent1"/>
-          </a:effectRef>
-          <a:fontRef idx="minor">
-            <a:schemeClr val="lt1"/>
-          </a:fontRef>
-        </p:style>
-        <p:txBody>
-          <a:bodyPr rtlCol="0" anchor="ctr"/>
-          <a:lstStyle/>
-          <a:p>
-            <a:pPr algn="ctr"/>
-          </a:p>
-        </p:txBody>
-      </p:sp>
-      <p:sp>
-        <p:nvSpPr>
-          <p:cNvPr id="24" name="TextBox 23"/>
-          <p:cNvSpPr txBox="1"/>
-          <p:nvPr/>
-        </p:nvSpPr>
-        <p:spPr>
-          <a:xfrm>
-            <a:off x="540000" y="4543200"/>
-            <a:ext cx="2448000" cy="612000"/>
-          </a:xfrm>
-          <a:prstGeom prst="rect">
-            <a:avLst/>
-          </a:prstGeom>
-          <a:noFill/>
-        </p:spPr>
-        <p:txBody>
-          <a:bodyPr wrap="square" anchor="t" lIns="0" rIns="0" tIns="0" bIns="0">
-            <a:spAutoFit/>
-          </a:bodyPr>
-          <a:lstStyle/>
-          <a:p>
-            <a:pPr algn="l">
-              <a:lnSpc>
-                <a:spcPct val="135000"/>
-              </a:lnSpc>
-            </a:pPr>
-            <a:r>
-              <a:rPr sz="1200" b="1">
-                <a:solidFill>
-                  <a:srgbClr val="1D5288"/>
-                </a:solidFill>
-                <a:latin typeface="微软雅黑"/>
-                <a:ea typeface="微软雅黑"/>
-                <a:cs typeface="微软雅黑"/>
-              </a:rPr>
-              <a:t>崔德昊</a:t>
-            </a:r>
-          </a:p>
-        </p:txBody>
-      </p:sp>
-      <p:sp>
-        <p:nvSpPr>
-          <p:cNvPr id="25" name="TextBox 24"/>
-          <p:cNvSpPr txBox="1"/>
-          <p:nvPr/>
-        </p:nvSpPr>
-        <p:spPr>
-          <a:xfrm>
-            <a:off x="3204000" y="4543200"/>
-            <a:ext cx="4104000" cy="612000"/>
-          </a:xfrm>
-          <a:prstGeom prst="rect">
-            <a:avLst/>
-          </a:prstGeom>
-          <a:noFill/>
-        </p:spPr>
-        <p:txBody>
-          <a:bodyPr wrap="square" anchor="t" lIns="0" rIns="0" tIns="0" bIns="0">
-            <a:spAutoFit/>
-          </a:bodyPr>
-          <a:lstStyle/>
-          <a:p>
-            <a:pPr algn="l">
-              <a:lnSpc>
-                <a:spcPct val="135000"/>
-              </a:lnSpc>
-            </a:pPr>
-            <a:r>
-              <a:rPr sz="1150" b="0">
-                <a:solidFill>
-                  <a:srgbClr val="1B2733"/>
-                </a:solidFill>
-                <a:latin typeface="微软雅黑"/>
-                <a:ea typeface="微软雅黑"/>
-                <a:cs typeface="微软雅黑"/>
-              </a:rPr>
-              <a:t>Prompt 工程与对照实验、数值溯源校验、实验统计</a:t>
-            </a:r>
-          </a:p>
-        </p:txBody>
-      </p:sp>
-      <p:sp>
-        <p:nvSpPr>
-          <p:cNvPr id="26" name="TextBox 25"/>
-          <p:cNvSpPr txBox="1"/>
-          <p:nvPr/>
-        </p:nvSpPr>
-        <p:spPr>
-          <a:xfrm>
-            <a:off x="7524000" y="4543200"/>
-            <a:ext cx="4104000" cy="612000"/>
-          </a:xfrm>
-          <a:prstGeom prst="rect">
-            <a:avLst/>
-          </a:prstGeom>
-          <a:noFill/>
-        </p:spPr>
-        <p:txBody>
-          <a:bodyPr wrap="square" anchor="t" lIns="0" rIns="0" tIns="0" bIns="0">
-            <a:spAutoFit/>
-          </a:bodyPr>
-          <a:lstStyle/>
-          <a:p>
-            <a:pPr algn="l">
-              <a:lnSpc>
-                <a:spcPct val="135000"/>
-              </a:lnSpc>
-            </a:pPr>
-            <a:r>
-              <a:rPr sz="1150" b="0">
-                <a:solidFill>
-                  <a:srgbClr val="1B2733"/>
-                </a:solidFill>
-                <a:latin typeface="微软雅黑"/>
-                <a:ea typeface="微软雅黑"/>
-                <a:cs typeface="微软雅黑"/>
-              </a:rPr>
-              <a:t>三层 Prompt 模板、评测脚本、实验数据与论文第 5 章</a:t>
-            </a:r>
-          </a:p>
-        </p:txBody>
-      </p:sp>
-      <p:sp>
-        <p:nvSpPr>
-          <p:cNvPr id="27" name="Rounded Rectangle 26"/>
-          <p:cNvSpPr/>
-          <p:nvPr/>
-        </p:nvSpPr>
-        <p:spPr>
-          <a:xfrm>
-            <a:off x="396000" y="5364000"/>
-            <a:ext cx="11304000" cy="1044000"/>
+            <a:off x="396000" y="5184000"/>
+            <a:ext cx="11304000" cy="1224000"/>
           </a:xfrm>
           <a:prstGeom prst="roundRect">
             <a:avLst>
@@ -12385,14 +12216,14 @@
       </p:sp>
       <p:sp>
         <p:nvSpPr>
-          <p:cNvPr id="28" name="TextBox 27"/>
-          <p:cNvSpPr txBox="1"/>
-          <p:nvPr/>
-        </p:nvSpPr>
-        <p:spPr>
-          <a:xfrm>
-            <a:off x="684000" y="5490000"/>
-            <a:ext cx="10800000" cy="827999"/>
+          <p:cNvPr id="24" name="TextBox 23"/>
+          <p:cNvSpPr txBox="1"/>
+          <p:nvPr/>
+        </p:nvSpPr>
+        <p:spPr>
+          <a:xfrm>
+            <a:off x="684000" y="5328000"/>
+            <a:ext cx="10800000" cy="1007999"/>
           </a:xfrm>
           <a:prstGeom prst="rect">
             <a:avLst/>
@@ -12444,7 +12275,7 @@
       </p:sp>
       <p:sp>
         <p:nvSpPr>
-          <p:cNvPr id="29" name="TextBox 28"/>
+          <p:cNvPr id="25" name="TextBox 24"/>
           <p:cNvSpPr txBox="1"/>
           <p:nvPr/>
         </p:nvSpPr>
@@ -12485,7 +12316,7 @@
       </p:sp>
       <p:sp>
         <p:nvSpPr>
-          <p:cNvPr id="30" name="TextBox 29"/>
+          <p:cNvPr id="26" name="TextBox 25"/>
           <p:cNvSpPr txBox="1"/>
           <p:nvPr/>
         </p:nvSpPr>

--- a/答辩材料/答辩PPT_财报智读.pptx
+++ b/答辩材料/答辩PPT_财报智读.pptx
@@ -4774,7 +4774,7 @@
               </a:lnSpc>
             </a:pPr>
             <a:r>
-              <a:rPr sz="3600" b="1">
+              <a:rPr sz="3300" b="1">
                 <a:solidFill>
                   <a:srgbClr val="FFFFFF"/>
                 </a:solidFill>
@@ -4782,7 +4782,7 @@
                 <a:ea typeface="微软雅黑"/>
                 <a:cs typeface="微软雅黑"/>
               </a:rPr>
-              <a:t>基于 Prompt 工程的</a:t>
+              <a:t>基于 Prompt 工程的上市公司财报解读</a:t>
             </a:r>
           </a:p>
           <a:p>
@@ -4792,7 +4792,7 @@
               </a:lnSpc>
             </a:pPr>
             <a:r>
-              <a:rPr sz="3600" b="1">
+              <a:rPr sz="3300" b="1">
                 <a:solidFill>
                   <a:srgbClr val="FFFFFF"/>
                 </a:solidFill>
@@ -4800,7 +4800,7 @@
                 <a:ea typeface="微软雅黑"/>
                 <a:cs typeface="微软雅黑"/>
               </a:rPr>
-              <a:t>上市公司财报解读与行业对标系统</a:t>
+              <a:t>与行业对标研究与实现</a:t>
             </a:r>
           </a:p>
         </p:txBody>
@@ -4926,7 +4926,7 @@
                 <a:ea typeface="微软雅黑"/>
                 <a:cs typeface="微软雅黑"/>
               </a:rPr>
-              <a:t>汇报人：韩宇　　团队成员：贾爱柯、崔德昊　　指导教师：桂斌</a:t>
+              <a:t>项目负责人：韩宇、贾爱柯　　成员：崔德昊　　指导教师：桂斌</a:t>
             </a:r>
           </a:p>
           <a:p>
@@ -11741,7 +11741,7 @@
                 <a:ea typeface="微软雅黑"/>
                 <a:cs typeface="微软雅黑"/>
               </a:rPr>
-              <a:t>韩宇（负责人）</a:t>
+              <a:t>韩宇（项目负责人）</a:t>
             </a:r>
           </a:p>
         </p:txBody>
@@ -11910,7 +11910,7 @@
                 <a:ea typeface="微软雅黑"/>
                 <a:cs typeface="微软雅黑"/>
               </a:rPr>
-              <a:t>贾爱柯</a:t>
+              <a:t>贾爱柯（项目负责人）</a:t>
             </a:r>
           </a:p>
         </p:txBody>
@@ -12079,7 +12079,7 @@
                 <a:ea typeface="微软雅黑"/>
                 <a:cs typeface="微软雅黑"/>
               </a:rPr>
-              <a:t>崔德昊</a:t>
+              <a:t>崔德昊（成员）</a:t>
             </a:r>
           </a:p>
         </p:txBody>
@@ -12530,7 +12530,7 @@
               </a:lnSpc>
             </a:pPr>
             <a:r>
-              <a:rPr sz="1500" b="0">
+              <a:rPr sz="1400" b="0">
                 <a:solidFill>
                   <a:srgbClr val="8AB4EC"/>
                 </a:solidFill>
@@ -12538,7 +12538,7 @@
                 <a:ea typeface="微软雅黑"/>
                 <a:cs typeface="微软雅黑"/>
               </a:rPr>
-              <a:t>基于 Prompt 工程的上市公司财报解读与行业对标系统</a:t>
+              <a:t>基于 Prompt 工程的上市公司财报解读与行业对标研究与实现</a:t>
             </a:r>
           </a:p>
         </p:txBody>

--- a/答辩材料/答辩PPT_财报智读.pptx
+++ b/答辩材料/答辩PPT_财报智读.pptx
@@ -901,7 +901,12 @@
           <a:lstStyle/>
           <a:p>
             <a:r>
-              <a:t>这是团队分工。三个人分别对应系统的三个部分：我负责系统架构、指标计算引擎、行业对标算法和数据库设计；贾爱柯负责前端界面与交互设计；崔德昊负责数据采集与质量核验、Prompt 工程与对照实验。桂斌老师负责整体指导。</a:t>
+              <a:t>这是团队分工。立项批复的项目负责人是韩宇与贾爱柯两位，海宸、崔德昊为项目成员。</a:t>
+            </a:r>
+          </a:p>
+          <a:p>
+            <a:r>
+              <a:t>四个人分别对应系统的四个部分：我负责系统架构、指标计算引擎和行业对标算法；贾爱柯负责前端界面与交互设计；海宸负责数据采集与质量校验、数据库设计；崔德昊负责 Prompt 工程与对照实验。桂斌老师负责整体指导。</a:t>
             </a:r>
           </a:p>
           <a:p>
@@ -4926,7 +4931,7 @@
                 <a:ea typeface="微软雅黑"/>
                 <a:cs typeface="微软雅黑"/>
               </a:rPr>
-              <a:t>项目负责人：韩宇、贾爱柯　　成员：崔德昊　　指导教师：桂斌</a:t>
+              <a:t>项目负责人：韩宇、贾爱柯　　成员：海宸、崔德昊　　指导教师：桂斌</a:t>
             </a:r>
           </a:p>
           <a:p>
@@ -11400,7 +11405,7 @@
                 <a:ea typeface="微软雅黑"/>
                 <a:cs typeface="微软雅黑"/>
               </a:rPr>
-              <a:t>三人分工与系统模块一一对应</a:t>
+              <a:t>四人分工与系统模块一一对应</a:t>
             </a:r>
           </a:p>
         </p:txBody>
@@ -11668,7 +11673,7 @@
         <p:spPr>
           <a:xfrm>
             <a:off x="396000" y="1800000"/>
-            <a:ext cx="11304000" cy="1080000"/>
+            <a:ext cx="11304000" cy="864000"/>
           </a:xfrm>
           <a:prstGeom prst="rect">
             <a:avLst/>
@@ -11713,8 +11718,8 @@
         </p:nvSpPr>
         <p:spPr>
           <a:xfrm>
-            <a:off x="540000" y="2023200"/>
-            <a:ext cx="2448000" cy="684000"/>
+            <a:off x="540000" y="1951200"/>
+            <a:ext cx="2448000" cy="612000"/>
           </a:xfrm>
           <a:prstGeom prst="rect">
             <a:avLst/>
@@ -11754,8 +11759,8 @@
         </p:nvSpPr>
         <p:spPr>
           <a:xfrm>
-            <a:off x="3204000" y="2023200"/>
-            <a:ext cx="4104000" cy="684000"/>
+            <a:off x="3204000" y="1951200"/>
+            <a:ext cx="4104000" cy="612000"/>
           </a:xfrm>
           <a:prstGeom prst="rect">
             <a:avLst/>
@@ -11782,7 +11787,7 @@
                 <a:ea typeface="微软雅黑"/>
                 <a:cs typeface="微软雅黑"/>
               </a:rPr>
-              <a:t>系统架构、指标计算引擎、行业对标算法、数据库设计</a:t>
+              <a:t>系统架构、指标计算引擎、行业对标算法</a:t>
             </a:r>
           </a:p>
         </p:txBody>
@@ -11795,8 +11800,8 @@
         </p:nvSpPr>
         <p:spPr>
           <a:xfrm>
-            <a:off x="7524000" y="2023200"/>
-            <a:ext cx="4104000" cy="684000"/>
+            <a:off x="7524000" y="1951200"/>
+            <a:ext cx="4104000" cy="612000"/>
           </a:xfrm>
           <a:prstGeom prst="rect">
             <a:avLst/>
@@ -11823,7 +11828,7 @@
                 <a:ea typeface="微软雅黑"/>
                 <a:cs typeface="微软雅黑"/>
               </a:rPr>
-              <a:t>后端核心代码、建表脚本、《技术文档》、论文第 3 章</a:t>
+              <a:t>后端核心代码、《技术文档》、论文第 3 章</a:t>
             </a:r>
           </a:p>
         </p:txBody>
@@ -11836,8 +11841,8 @@
         </p:nvSpPr>
         <p:spPr>
           <a:xfrm>
-            <a:off x="396000" y="2880000"/>
-            <a:ext cx="11304000" cy="1080000"/>
+            <a:off x="396000" y="2664000"/>
+            <a:ext cx="11304000" cy="864000"/>
           </a:xfrm>
           <a:prstGeom prst="rect">
             <a:avLst/>
@@ -11882,8 +11887,8 @@
         </p:nvSpPr>
         <p:spPr>
           <a:xfrm>
-            <a:off x="540000" y="3103200"/>
-            <a:ext cx="2448000" cy="684000"/>
+            <a:off x="540000" y="2815200"/>
+            <a:ext cx="2448000" cy="612000"/>
           </a:xfrm>
           <a:prstGeom prst="rect">
             <a:avLst/>
@@ -11923,8 +11928,8 @@
         </p:nvSpPr>
         <p:spPr>
           <a:xfrm>
-            <a:off x="3204000" y="3103200"/>
-            <a:ext cx="4104000" cy="684000"/>
+            <a:off x="3204000" y="2815200"/>
+            <a:ext cx="4104000" cy="612000"/>
           </a:xfrm>
           <a:prstGeom prst="rect">
             <a:avLst/>
@@ -11951,7 +11956,7 @@
                 <a:ea typeface="微软雅黑"/>
                 <a:cs typeface="微软雅黑"/>
               </a:rPr>
-              <a:t>前端界面与交互、设计令牌体系、ECharts 可视化、响应式与数据导出</a:t>
+              <a:t>前端界面与交互、设计令牌体系、ECharts 可视化</a:t>
             </a:r>
           </a:p>
         </p:txBody>
@@ -11964,8 +11969,8 @@
         </p:nvSpPr>
         <p:spPr>
           <a:xfrm>
-            <a:off x="7524000" y="3103200"/>
-            <a:ext cx="4104000" cy="684000"/>
+            <a:off x="7524000" y="2815200"/>
+            <a:ext cx="4104000" cy="612000"/>
           </a:xfrm>
           <a:prstGeom prst="rect">
             <a:avLst/>
@@ -12005,8 +12010,8 @@
         </p:nvSpPr>
         <p:spPr>
           <a:xfrm>
-            <a:off x="396000" y="3960000"/>
-            <a:ext cx="11304000" cy="1080000"/>
+            <a:off x="396000" y="3528000"/>
+            <a:ext cx="11304000" cy="864000"/>
           </a:xfrm>
           <a:prstGeom prst="rect">
             <a:avLst/>
@@ -12051,8 +12056,8 @@
         </p:nvSpPr>
         <p:spPr>
           <a:xfrm>
-            <a:off x="540000" y="4183200"/>
-            <a:ext cx="2448000" cy="684000"/>
+            <a:off x="540000" y="3679200"/>
+            <a:ext cx="2448000" cy="612000"/>
           </a:xfrm>
           <a:prstGeom prst="rect">
             <a:avLst/>
@@ -12079,6 +12084,175 @@
                 <a:ea typeface="微软雅黑"/>
                 <a:cs typeface="微软雅黑"/>
               </a:rPr>
+              <a:t>海宸（成员）</a:t>
+            </a:r>
+          </a:p>
+        </p:txBody>
+      </p:sp>
+      <p:sp>
+        <p:nvSpPr>
+          <p:cNvPr id="21" name="TextBox 20"/>
+          <p:cNvSpPr txBox="1"/>
+          <p:nvPr/>
+        </p:nvSpPr>
+        <p:spPr>
+          <a:xfrm>
+            <a:off x="3204000" y="3679200"/>
+            <a:ext cx="4104000" cy="612000"/>
+          </a:xfrm>
+          <a:prstGeom prst="rect">
+            <a:avLst/>
+          </a:prstGeom>
+          <a:noFill/>
+        </p:spPr>
+        <p:txBody>
+          <a:bodyPr wrap="square" anchor="t" lIns="0" rIns="0" tIns="0" bIns="0">
+            <a:spAutoFit/>
+          </a:bodyPr>
+          <a:lstStyle/>
+          <a:p>
+            <a:pPr algn="l">
+              <a:lnSpc>
+                <a:spcPct val="135000"/>
+              </a:lnSpc>
+            </a:pPr>
+            <a:r>
+              <a:rPr sz="1150" b="0">
+                <a:solidFill>
+                  <a:srgbClr val="1B2733"/>
+                </a:solidFill>
+                <a:latin typeface="微软雅黑"/>
+                <a:ea typeface="微软雅黑"/>
+                <a:cs typeface="微软雅黑"/>
+              </a:rPr>
+              <a:t>数据采集与质量校验、数据库设计、估值快照</a:t>
+            </a:r>
+          </a:p>
+        </p:txBody>
+      </p:sp>
+      <p:sp>
+        <p:nvSpPr>
+          <p:cNvPr id="22" name="TextBox 21"/>
+          <p:cNvSpPr txBox="1"/>
+          <p:nvPr/>
+        </p:nvSpPr>
+        <p:spPr>
+          <a:xfrm>
+            <a:off x="7524000" y="3679200"/>
+            <a:ext cx="4104000" cy="612000"/>
+          </a:xfrm>
+          <a:prstGeom prst="rect">
+            <a:avLst/>
+          </a:prstGeom>
+          <a:noFill/>
+        </p:spPr>
+        <p:txBody>
+          <a:bodyPr wrap="square" anchor="t" lIns="0" rIns="0" tIns="0" bIns="0">
+            <a:spAutoFit/>
+          </a:bodyPr>
+          <a:lstStyle/>
+          <a:p>
+            <a:pPr algn="l">
+              <a:lnSpc>
+                <a:spcPct val="135000"/>
+              </a:lnSpc>
+            </a:pPr>
+            <a:r>
+              <a:rPr sz="1150" b="0">
+                <a:solidFill>
+                  <a:srgbClr val="1B2733"/>
+                </a:solidFill>
+                <a:latin typeface="微软雅黑"/>
+                <a:ea typeface="微软雅黑"/>
+                <a:cs typeface="微软雅黑"/>
+              </a:rPr>
+              <a:t>数据采集脚本、建表脚本、数据核验表</a:t>
+            </a:r>
+          </a:p>
+        </p:txBody>
+      </p:sp>
+      <p:sp>
+        <p:nvSpPr>
+          <p:cNvPr id="23" name="Rectangle 22"/>
+          <p:cNvSpPr/>
+          <p:nvPr/>
+        </p:nvSpPr>
+        <p:spPr>
+          <a:xfrm>
+            <a:off x="396000" y="4392000"/>
+            <a:ext cx="11304000" cy="864000"/>
+          </a:xfrm>
+          <a:prstGeom prst="rect">
+            <a:avLst/>
+          </a:prstGeom>
+          <a:solidFill>
+            <a:srgbClr val="EEF2F7"/>
+          </a:solidFill>
+          <a:ln w="9525">
+            <a:solidFill>
+              <a:srgbClr val="E1E8F0"/>
+            </a:solidFill>
+          </a:ln>
+          <a:effectLst/>
+        </p:spPr>
+        <p:style>
+          <a:lnRef idx="1">
+            <a:schemeClr val="accent1"/>
+          </a:lnRef>
+          <a:fillRef idx="3">
+            <a:schemeClr val="accent1"/>
+          </a:fillRef>
+          <a:effectRef idx="2">
+            <a:schemeClr val="accent1"/>
+          </a:effectRef>
+          <a:fontRef idx="minor">
+            <a:schemeClr val="lt1"/>
+          </a:fontRef>
+        </p:style>
+        <p:txBody>
+          <a:bodyPr rtlCol="0" anchor="ctr"/>
+          <a:lstStyle/>
+          <a:p>
+            <a:pPr algn="ctr"/>
+          </a:p>
+        </p:txBody>
+      </p:sp>
+      <p:sp>
+        <p:nvSpPr>
+          <p:cNvPr id="24" name="TextBox 23"/>
+          <p:cNvSpPr txBox="1"/>
+          <p:nvPr/>
+        </p:nvSpPr>
+        <p:spPr>
+          <a:xfrm>
+            <a:off x="540000" y="4543200"/>
+            <a:ext cx="2448000" cy="612000"/>
+          </a:xfrm>
+          <a:prstGeom prst="rect">
+            <a:avLst/>
+          </a:prstGeom>
+          <a:noFill/>
+        </p:spPr>
+        <p:txBody>
+          <a:bodyPr wrap="square" anchor="t" lIns="0" rIns="0" tIns="0" bIns="0">
+            <a:spAutoFit/>
+          </a:bodyPr>
+          <a:lstStyle/>
+          <a:p>
+            <a:pPr algn="l">
+              <a:lnSpc>
+                <a:spcPct val="135000"/>
+              </a:lnSpc>
+            </a:pPr>
+            <a:r>
+              <a:rPr sz="1200" b="1">
+                <a:solidFill>
+                  <a:srgbClr val="1D5288"/>
+                </a:solidFill>
+                <a:latin typeface="微软雅黑"/>
+                <a:ea typeface="微软雅黑"/>
+                <a:cs typeface="微软雅黑"/>
+              </a:rPr>
               <a:t>崔德昊（成员）</a:t>
             </a:r>
           </a:p>
@@ -12086,14 +12260,14 @@
       </p:sp>
       <p:sp>
         <p:nvSpPr>
-          <p:cNvPr id="21" name="TextBox 20"/>
-          <p:cNvSpPr txBox="1"/>
-          <p:nvPr/>
-        </p:nvSpPr>
-        <p:spPr>
-          <a:xfrm>
-            <a:off x="3204000" y="4183200"/>
-            <a:ext cx="4104000" cy="684000"/>
+          <p:cNvPr id="25" name="TextBox 24"/>
+          <p:cNvSpPr txBox="1"/>
+          <p:nvPr/>
+        </p:nvSpPr>
+        <p:spPr>
+          <a:xfrm>
+            <a:off x="3204000" y="4543200"/>
+            <a:ext cx="4104000" cy="612000"/>
           </a:xfrm>
           <a:prstGeom prst="rect">
             <a:avLst/>
@@ -12120,21 +12294,21 @@
                 <a:ea typeface="微软雅黑"/>
                 <a:cs typeface="微软雅黑"/>
               </a:rPr>
-              <a:t>数据采集与质量核验、Prompt 工程与对照实验、数值溯源校验、实验统计</a:t>
-            </a:r>
-          </a:p>
-        </p:txBody>
-      </p:sp>
-      <p:sp>
-        <p:nvSpPr>
-          <p:cNvPr id="22" name="TextBox 21"/>
-          <p:cNvSpPr txBox="1"/>
-          <p:nvPr/>
-        </p:nvSpPr>
-        <p:spPr>
-          <a:xfrm>
-            <a:off x="7524000" y="4183200"/>
-            <a:ext cx="4104000" cy="684000"/>
+              <a:t>Prompt 工程与对照实验、数值溯源校验、实验统计</a:t>
+            </a:r>
+          </a:p>
+        </p:txBody>
+      </p:sp>
+      <p:sp>
+        <p:nvSpPr>
+          <p:cNvPr id="26" name="TextBox 25"/>
+          <p:cNvSpPr txBox="1"/>
+          <p:nvPr/>
+        </p:nvSpPr>
+        <p:spPr>
+          <a:xfrm>
+            <a:off x="7524000" y="4543200"/>
+            <a:ext cx="4104000" cy="612000"/>
           </a:xfrm>
           <a:prstGeom prst="rect">
             <a:avLst/>
@@ -12161,21 +12335,21 @@
                 <a:ea typeface="微软雅黑"/>
                 <a:cs typeface="微软雅黑"/>
               </a:rPr>
-              <a:t>采集脚本、三层 Prompt 模板、评测脚本、实验数据与论文第 5 章</a:t>
-            </a:r>
-          </a:p>
-        </p:txBody>
-      </p:sp>
-      <p:sp>
-        <p:nvSpPr>
-          <p:cNvPr id="23" name="Rounded Rectangle 22"/>
+              <a:t>三层 Prompt 模板、评测脚本、实验数据与论文第 5 章</a:t>
+            </a:r>
+          </a:p>
+        </p:txBody>
+      </p:sp>
+      <p:sp>
+        <p:nvSpPr>
+          <p:cNvPr id="27" name="Rounded Rectangle 26"/>
           <p:cNvSpPr/>
           <p:nvPr/>
         </p:nvSpPr>
         <p:spPr>
           <a:xfrm>
-            <a:off x="396000" y="5184000"/>
-            <a:ext cx="11304000" cy="1224000"/>
+            <a:off x="396000" y="5364000"/>
+            <a:ext cx="11304000" cy="1044000"/>
           </a:xfrm>
           <a:prstGeom prst="roundRect">
             <a:avLst>
@@ -12216,14 +12390,14 @@
       </p:sp>
       <p:sp>
         <p:nvSpPr>
-          <p:cNvPr id="24" name="TextBox 23"/>
-          <p:cNvSpPr txBox="1"/>
-          <p:nvPr/>
-        </p:nvSpPr>
-        <p:spPr>
-          <a:xfrm>
-            <a:off x="684000" y="5328000"/>
-            <a:ext cx="10800000" cy="1007999"/>
+          <p:cNvPr id="28" name="TextBox 27"/>
+          <p:cNvSpPr txBox="1"/>
+          <p:nvPr/>
+        </p:nvSpPr>
+        <p:spPr>
+          <a:xfrm>
+            <a:off x="684000" y="5490000"/>
+            <a:ext cx="10800000" cy="827999"/>
           </a:xfrm>
           <a:prstGeom prst="rect">
             <a:avLst/>
@@ -12275,7 +12449,7 @@
       </p:sp>
       <p:sp>
         <p:nvSpPr>
-          <p:cNvPr id="25" name="TextBox 24"/>
+          <p:cNvPr id="29" name="TextBox 28"/>
           <p:cNvSpPr txBox="1"/>
           <p:nvPr/>
         </p:nvSpPr>
@@ -12316,7 +12490,7 @@
       </p:sp>
       <p:sp>
         <p:nvSpPr>
-          <p:cNvPr id="26" name="TextBox 25"/>
+          <p:cNvPr id="30" name="TextBox 29"/>
           <p:cNvSpPr txBox="1"/>
           <p:nvPr/>
         </p:nvSpPr>
